--- a/Chap OP-Amp_PDS.pptx
+++ b/Chap OP-Amp_PDS.pptx
@@ -15792,7 +15792,7 @@
           <a:graphicData uri="http://schemas.openxmlformats.org/presentationml/2006/ole">
             <mc:AlternateContent xmlns:mc="http://schemas.openxmlformats.org/markup-compatibility/2006">
               <mc:Choice xmlns:v="urn:schemas-microsoft-com:vml" Requires="v">
-                <p:oleObj spid="_x0000_s1032" name="Equation" r:id="rId3" imgW="1130040" imgH="431640" progId="Equation.3">
+                <p:oleObj spid="_x0000_s1034" name="Equation" r:id="rId3" imgW="1130040" imgH="431640" progId="Equation.3">
                   <p:embed/>
                 </p:oleObj>
               </mc:Choice>
@@ -17455,8 +17455,8 @@
         </p:blipFill>
         <p:spPr>
           <a:xfrm>
-            <a:off x="2943094" y="2229632"/>
-            <a:ext cx="6125750" cy="4221271"/>
+            <a:off x="2943094" y="2898843"/>
+            <a:ext cx="6125750" cy="3552060"/>
           </a:xfrm>
           <a:prstGeom prst="rect">
             <a:avLst/>
@@ -18753,6 +18753,13 @@
   <p:clrMapOvr>
     <a:masterClrMapping/>
   </p:clrMapOvr>
+  <p:timing>
+    <p:tnLst>
+      <p:par>
+        <p:cTn id="1" dur="indefinite" restart="never" nodeType="tmRoot"/>
+      </p:par>
+    </p:tnLst>
+  </p:timing>
 </p:sld>
 </file>
 
@@ -18840,6 +18847,34 @@
           </a:p>
         </p:txBody>
       </p:sp>
+      <p:sp>
+        <p:nvSpPr>
+          <p:cNvPr id="4" name="Rectangle 3"/>
+          <p:cNvSpPr/>
+          <p:nvPr/>
+        </p:nvSpPr>
+        <p:spPr>
+          <a:xfrm>
+            <a:off x="1293063" y="4178190"/>
+            <a:ext cx="5311582" cy="369332"/>
+          </a:xfrm>
+          <a:prstGeom prst="rect">
+            <a:avLst/>
+          </a:prstGeom>
+        </p:spPr>
+        <p:txBody>
+          <a:bodyPr wrap="none">
+            <a:spAutoFit/>
+          </a:bodyPr>
+          <a:lstStyle/>
+          <a:p>
+            <a:r>
+              <a:rPr lang="en-US" dirty="0"/>
+              <a:t>https://github.com/amelcharolinesgn2/DE-Lab/upload</a:t>
+            </a:r>
+          </a:p>
+        </p:txBody>
+      </p:sp>
     </p:spTree>
     <p:extLst>
       <p:ext uri="{BB962C8B-B14F-4D97-AF65-F5344CB8AC3E}">
@@ -18850,6 +18885,13 @@
   <p:clrMapOvr>
     <a:masterClrMapping/>
   </p:clrMapOvr>
+  <p:timing>
+    <p:tnLst>
+      <p:par>
+        <p:cTn id="1" dur="indefinite" restart="never" nodeType="tmRoot"/>
+      </p:par>
+    </p:tnLst>
+  </p:timing>
 </p:sld>
 </file>
 
